--- a/decks/englang-p1/englang-p1_ch4_q3-structure.pptx
+++ b/decks/englang-p1/englang-p1_ch4_q3-structure.pptx
@@ -127,30 +127,30 @@
   <p:extLst>
     <p:ext uri="{521415D9-36F7-43E2-AB2F-B90AF26B5E84}">
       <p14:sectionLst xmlns:p14="http://schemas.microsoft.com/office/powerpoint/2010/main">
-        <p14:section name="Opening" id="{2373bc99-50fd-d949-fe09-6eeacba3ae49}">
+        <p14:section name="Opening" id="{cc68c2c6-22f3-166e-df97-e38299cb535f}">
           <p14:sldIdLst>
             <p14:sldId id="256"/>
           </p14:sldIdLst>
         </p14:section>
-        <p14:section name="Gate" id="{358ba1aa-0f59-ced6-ab18-13535bd983b6}">
+        <p14:section name="Gate" id="{3e7c8e14-7f28-2004-f906-96db0f3e3135}">
           <p14:sldIdLst>
             <p14:sldId id="257"/>
             <p14:sldId id="258"/>
           </p14:sldIdLst>
         </p14:section>
-        <p14:section name="Pre-teach" id="{036767c8-0c8c-2d20-205c-0b64f06cfaa9}">
+        <p14:section name="Pre-teach" id="{67445928-b255-92e4-04a0-94c6f62ab9f5}">
           <p14:sldIdLst>
             <p14:sldId id="259"/>
             <p14:sldId id="260"/>
           </p14:sldIdLst>
         </p14:section>
-        <p14:section name="Read-along" id="{c18aaf48-3773-bf5b-510d-14d2a93facb0}">
+        <p14:section name="Read-along" id="{0b8d75ec-24b5-37c0-b5e8-91df329e8e9b}">
           <p14:sldIdLst>
             <p14:sldId id="261"/>
             <p14:sldId id="262"/>
           </p14:sldIdLst>
         </p14:section>
-        <p14:section name="Teach" id="{0a5aa906-08e6-7241-2adf-fe47b9aef7a1}">
+        <p14:section name="Teach" id="{b9396f42-5cc8-d110-c22f-5ba62952f333}">
           <p14:sldIdLst>
             <p14:sldId id="263"/>
             <p14:sldId id="264"/>
@@ -160,7 +160,7 @@
             <p14:sldId id="268"/>
           </p14:sldIdLst>
         </p14:section>
-        <p14:section name="Routes" id="{8d269ec9-4795-5096-25af-e691e6673533}">
+        <p14:section name="Routes" id="{8cc11c32-d6b3-b3b8-8bc1-fb9523932ca2}">
           <p14:sldIdLst>
             <p14:sldId id="269"/>
             <p14:sldId id="270"/>
@@ -168,12 +168,12 @@
             <p14:sldId id="272"/>
           </p14:sldIdLst>
         </p14:section>
-        <p14:section name="Close" id="{e84d9b8b-e9a7-b62c-58f5-d6166b86d7e6}">
+        <p14:section name="Close" id="{c8665641-1254-9d7c-6bad-b5f6812e3599}">
           <p14:sldIdLst>
             <p14:sldId id="273"/>
           </p14:sldIdLst>
         </p14:section>
-        <p14:section name="Answers" id="{258b9d2d-9d61-f325-4e35-2ba131689810}">
+        <p14:section name="Answers" id="{742a06bc-94b6-18d7-a335-73fe9096cfcb}">
           <p14:sldIdLst>
             <p14:sldId id="274"/>
             <p14:sldId id="275"/>
@@ -1423,7 +1423,7 @@
               <a:rPr lang="en-US" dirty="0"/>
               <a:t>Exit ticket — individual, silent, on a slip or mini-whiteboard. Recall before help: no notes, no lanes, no hints. Collect before pupils leave.
 Question: Which of these is a structural feature?
-Answer: A   Flashback. A flashback changes the order of time, so it is about structure. The others are language features.
+Answer: C   Flashback. A flashback changes the order of time, so it is about structure. The others are language features.
 Source of this question: gate item 1 re-asked (options rotated) — this chapter has no third quick-check module.
 The ebook also holds task 3, "Question 3 practice answer", for homework or the next lesson's do now.
 Sort the slips: correct → ready to move on; incorrect → start next lesson in the pre-teach group, with the read-along and the Support lane. Same destination next time.</a:t>
@@ -1606,9 +1606,9 @@
             <a:r>
               <a:rPr lang="en-US" dirty="0"/>
               <a:t>Do now — retrieval. Silent, no notes, no help: recall comes before any support. Give about four minutes.
-1. Which of these is a structural feature?  →  B   Flashback
+1. Which of these is a structural feature?  →  D   Flashback
 2. Moving from a wide view of a setting to one small detail is called zooming ___.  →  in
-3. Question 3 asks you to write about…  →  B   the structure of the whole source
+3. Question 3 asks you to write about…  →  D   the structure of the whole source
 Circulate: who gets 3/3 (Stretch route), 2/3 (Core), 0–1 (Support)? Use this to route pupils later in the lesson.</a:t>
             </a:r>
             <a:endParaRPr lang="en-US" dirty="0"/>
@@ -1789,7 +1789,7 @@
             <a:r>
               <a:rPr lang="en-US" dirty="0"/>
               <a:t>Answers — exit ticket: Exit ticket. Reveal the answer; pupils mark their own work in a different colour, then read the "why" together. Same destination for every lane, so one answer serves the whole class.
-Answer: A   Flashback
+Answer: C   Flashback
 Why: A flashback changes the order of time, so it is about structure. The others are language features.
 Ask a Support pupil to explain one step, and a Stretch pupil to share their extension.</a:t>
             </a:r>
@@ -1880,9 +1880,9 @@
             <a:r>
               <a:rPr lang="en-US" dirty="0"/>
               <a:t>Answers — pupils mark their own in a different colour, then hands up for 3/3, 2/3, 1/3.
-1. B   Flashback. A flashback changes the order of time, so it is about structure. The others are language features.
+1. D   Flashback. A flashback changes the order of time, so it is about structure. The others are language features.
 2. in. Zooming in narrows the focus from the wide setting to a detail.
-3. B   the structure of the whole source. Question 3 covers the whole source: beginning, middle and end.
+3. D   the structure of the whole source. Question 3 covers the whole source: beginning, middle and end.
 Say the route each score points to: 3/3 Stretch, 2/3 Core, 0–1 Support. Pupils may choose to move up.</a:t>
             </a:r>
             <a:endParaRPr lang="en-US" dirty="0"/>
@@ -10849,7 +10849,7 @@
                 <a:ea typeface="Calibri" pitchFamily="34" charset="-122"/>
                 <a:cs typeface="Calibri" pitchFamily="34" charset="-120"/>
               </a:rPr>
-              <a:t>Flashback</a:t>
+              <a:t>Adjective</a:t>
             </a:r>
             <a:endParaRPr lang="en-US" sz="2400" dirty="0"/>
           </a:p>
@@ -10886,7 +10886,7 @@
                 <a:ea typeface="Calibri" pitchFamily="34" charset="-122"/>
                 <a:cs typeface="Calibri" pitchFamily="34" charset="-120"/>
               </a:rPr>
-              <a:t>Alliteration</a:t>
+              <a:t>Simile</a:t>
             </a:r>
             <a:endParaRPr lang="en-US" sz="2400" dirty="0"/>
           </a:p>
@@ -10923,7 +10923,7 @@
                 <a:ea typeface="Calibri" pitchFamily="34" charset="-122"/>
                 <a:cs typeface="Calibri" pitchFamily="34" charset="-120"/>
               </a:rPr>
-              <a:t>Adjective</a:t>
+              <a:t>Flashback</a:t>
             </a:r>
             <a:endParaRPr lang="en-US" sz="2400" dirty="0"/>
           </a:p>
@@ -10960,7 +10960,7 @@
                 <a:ea typeface="Calibri" pitchFamily="34" charset="-122"/>
                 <a:cs typeface="Calibri" pitchFamily="34" charset="-120"/>
               </a:rPr>
-              <a:t>Simile</a:t>
+              <a:t>Alliteration</a:t>
             </a:r>
             <a:endParaRPr lang="en-US" sz="2400" dirty="0"/>
           </a:p>
@@ -12084,7 +12084,7 @@
                 <a:ea typeface="Calibri" pitchFamily="34" charset="-122"/>
                 <a:cs typeface="Calibri" pitchFamily="34" charset="-120"/>
               </a:rPr>
-              <a:t>Simile</a:t>
+              <a:t>Alliteration</a:t>
             </a:r>
             <a:endParaRPr lang="en-US" sz="2400" dirty="0"/>
           </a:p>
@@ -12121,7 +12121,7 @@
                 <a:ea typeface="Calibri" pitchFamily="34" charset="-122"/>
                 <a:cs typeface="Calibri" pitchFamily="34" charset="-120"/>
               </a:rPr>
-              <a:t>Flashback</a:t>
+              <a:t>Adjective</a:t>
             </a:r>
             <a:endParaRPr lang="en-US" sz="2400" dirty="0"/>
           </a:p>
@@ -12158,7 +12158,7 @@
                 <a:ea typeface="Calibri" pitchFamily="34" charset="-122"/>
                 <a:cs typeface="Calibri" pitchFamily="34" charset="-120"/>
               </a:rPr>
-              <a:t>Alliteration</a:t>
+              <a:t>Simile</a:t>
             </a:r>
             <a:endParaRPr lang="en-US" sz="2400" dirty="0"/>
           </a:p>
@@ -12195,7 +12195,7 @@
                 <a:ea typeface="Calibri" pitchFamily="34" charset="-122"/>
                 <a:cs typeface="Calibri" pitchFamily="34" charset="-120"/>
               </a:rPr>
-              <a:t>Adjective</a:t>
+              <a:t>Flashback</a:t>
             </a:r>
             <a:endParaRPr lang="en-US" sz="2400" dirty="0"/>
           </a:p>
@@ -12634,7 +12634,7 @@
                 <a:ea typeface="Calibri" pitchFamily="34" charset="-122"/>
                 <a:cs typeface="Calibri" pitchFamily="34" charset="-120"/>
               </a:rPr>
-              <a:t>the structure of the whole source</a:t>
+              <a:t>your own story</a:t>
             </a:r>
             <a:endParaRPr lang="en-US" sz="2400" dirty="0"/>
           </a:p>
@@ -12708,7 +12708,7 @@
                 <a:ea typeface="Calibri" pitchFamily="34" charset="-122"/>
                 <a:cs typeface="Calibri" pitchFamily="34" charset="-120"/>
               </a:rPr>
-              <a:t>your own story</a:t>
+              <a:t>the structure of the whole source</a:t>
             </a:r>
             <a:endParaRPr lang="en-US" sz="2400" dirty="0"/>
           </a:p>
@@ -13654,7 +13654,7 @@
                 <a:ea typeface="Cambria" pitchFamily="34" charset="-122"/>
                 <a:cs typeface="Cambria" pitchFamily="34" charset="-120"/>
               </a:rPr>
-              <a:t>A   Flashback</a:t>
+              <a:t>C   Flashback</a:t>
             </a:r>
             <a:endParaRPr lang="en-US" sz="1800" dirty="0"/>
           </a:p>
@@ -14175,7 +14175,7 @@
                 <a:ea typeface="Calibri" pitchFamily="34" charset="-122"/>
                 <a:cs typeface="Calibri" pitchFamily="34" charset="-120"/>
               </a:rPr>
-              <a:t>B   Flashback</a:t>
+              <a:t>D   Flashback</a:t>
             </a:r>
             <a:endParaRPr lang="en-US" sz="2200" dirty="0"/>
           </a:p>
@@ -14675,7 +14675,7 @@
                 <a:ea typeface="Calibri" pitchFamily="34" charset="-122"/>
                 <a:cs typeface="Calibri" pitchFamily="34" charset="-120"/>
               </a:rPr>
-              <a:t>B   the structure of the whole source</a:t>
+              <a:t>D   the structure of the whole source</a:t>
             </a:r>
             <a:endParaRPr lang="en-US" sz="2200" dirty="0"/>
           </a:p>

--- a/decks/englang-p1/englang-p1_ch4_q3-structure.pptx
+++ b/decks/englang-p1/englang-p1_ch4_q3-structure.pptx
@@ -127,30 +127,30 @@
   <p:extLst>
     <p:ext uri="{521415D9-36F7-43E2-AB2F-B90AF26B5E84}">
       <p14:sectionLst xmlns:p14="http://schemas.microsoft.com/office/powerpoint/2010/main">
-        <p14:section name="Opening" id="{cc68c2c6-22f3-166e-df97-e38299cb535f}">
+        <p14:section name="Opening" id="{362d9440-bca9-004a-fc78-92ed843be862}">
           <p14:sldIdLst>
             <p14:sldId id="256"/>
           </p14:sldIdLst>
         </p14:section>
-        <p14:section name="Gate" id="{3e7c8e14-7f28-2004-f906-96db0f3e3135}">
+        <p14:section name="Gate" id="{c601fafb-5aaa-fa0b-1f8f-998b214658fc}">
           <p14:sldIdLst>
             <p14:sldId id="257"/>
             <p14:sldId id="258"/>
           </p14:sldIdLst>
         </p14:section>
-        <p14:section name="Pre-teach" id="{67445928-b255-92e4-04a0-94c6f62ab9f5}">
+        <p14:section name="Pre-teach" id="{d9ab8d77-b71f-0c02-dff8-1bf35baa16ab}">
           <p14:sldIdLst>
             <p14:sldId id="259"/>
             <p14:sldId id="260"/>
           </p14:sldIdLst>
         </p14:section>
-        <p14:section name="Read-along" id="{0b8d75ec-24b5-37c0-b5e8-91df329e8e9b}">
+        <p14:section name="Read-along" id="{3925bd7b-3bb4-d074-8f56-c91be795ea67}">
           <p14:sldIdLst>
             <p14:sldId id="261"/>
             <p14:sldId id="262"/>
           </p14:sldIdLst>
         </p14:section>
-        <p14:section name="Teach" id="{b9396f42-5cc8-d110-c22f-5ba62952f333}">
+        <p14:section name="Teach" id="{7a5c9708-aa35-e373-09dd-48f4bb80436b}">
           <p14:sldIdLst>
             <p14:sldId id="263"/>
             <p14:sldId id="264"/>
@@ -160,7 +160,7 @@
             <p14:sldId id="268"/>
           </p14:sldIdLst>
         </p14:section>
-        <p14:section name="Routes" id="{8cc11c32-d6b3-b3b8-8bc1-fb9523932ca2}">
+        <p14:section name="Routes" id="{0642a045-abb0-d358-365a-bdeed95fba4a}">
           <p14:sldIdLst>
             <p14:sldId id="269"/>
             <p14:sldId id="270"/>
@@ -168,12 +168,12 @@
             <p14:sldId id="272"/>
           </p14:sldIdLst>
         </p14:section>
-        <p14:section name="Close" id="{c8665641-1254-9d7c-6bad-b5f6812e3599}">
+        <p14:section name="Close" id="{923254ca-7462-99fa-1c4a-73bc6a8b219c}">
           <p14:sldIdLst>
             <p14:sldId id="273"/>
           </p14:sldIdLst>
         </p14:section>
-        <p14:section name="Answers" id="{742a06bc-94b6-18d7-a335-73fe9096cfcb}">
+        <p14:section name="Answers" id="{5867f04b-de25-a33a-e961-0c56231f26d6}">
           <p14:sldIdLst>
             <p14:sldId id="274"/>
             <p14:sldId id="275"/>
